--- a/assets/pptx/catalog-538.pptx
+++ b/assets/pptx/catalog-538.pptx
@@ -3612,7 +3612,7 @@
                 <a:ea typeface="Ebrima"/>
                 <a:cs typeface="Ebrima"/>
               </a:rPr>
-              <a:t>ጌታ(8×)</a:t>
+              <a:t>ጌታ8×</a:t>
             </a:r>
           </a:p>
         </p:txBody>
@@ -4282,7 +4282,7 @@
                 <a:ea typeface="Ebrima"/>
                 <a:cs typeface="Ebrima"/>
               </a:rPr>
-              <a:t>ጌታ(8×)</a:t>
+              <a:t>ጌታ8×</a:t>
             </a:r>
           </a:p>
         </p:txBody>
@@ -4952,7 +4952,7 @@
                 <a:ea typeface="Ebrima"/>
                 <a:cs typeface="Ebrima"/>
               </a:rPr>
-              <a:t>ጌታ(8×)</a:t>
+              <a:t>ጌታ8×</a:t>
             </a:r>
           </a:p>
         </p:txBody>
@@ -5287,7 +5287,7 @@
                 <a:ea typeface="Ebrima"/>
                 <a:cs typeface="Ebrima"/>
               </a:rPr>
-              <a:t>ልዩ(8×)</a:t>
+              <a:t>ልዩ8×</a:t>
             </a:r>
           </a:p>
         </p:txBody>
@@ -5488,7 +5488,7 @@
                 <a:ea typeface="Ebrima"/>
                 <a:cs typeface="Ebrima"/>
               </a:rPr>
-              <a:t>ጌታ(8×)</a:t>
+              <a:t>ጌታ8×</a:t>
             </a:r>
           </a:p>
         </p:txBody>
